--- a/Gastric2_gui_bsDung.pptx
+++ b/Gastric2_gui_bsDung.pptx
@@ -270,7 +270,7 @@
           <a:p>
             <a:fld id="{F54C3776-947E-4484-AAB5-B01793E07358}" type="datetimeFigureOut">
               <a:rPr lang="en-US" smtClean="0"/>
-              <a:t>4/25/2025</a:t>
+              <a:t>5/12/2025</a:t>
             </a:fld>
             <a:endParaRPr lang="en-US"/>
           </a:p>
@@ -468,7 +468,7 @@
           <a:p>
             <a:fld id="{F54C3776-947E-4484-AAB5-B01793E07358}" type="datetimeFigureOut">
               <a:rPr lang="en-US" smtClean="0"/>
-              <a:t>4/25/2025</a:t>
+              <a:t>5/12/2025</a:t>
             </a:fld>
             <a:endParaRPr lang="en-US"/>
           </a:p>
@@ -676,7 +676,7 @@
           <a:p>
             <a:fld id="{F54C3776-947E-4484-AAB5-B01793E07358}" type="datetimeFigureOut">
               <a:rPr lang="en-US" smtClean="0"/>
-              <a:t>4/25/2025</a:t>
+              <a:t>5/12/2025</a:t>
             </a:fld>
             <a:endParaRPr lang="en-US"/>
           </a:p>
@@ -874,7 +874,7 @@
           <a:p>
             <a:fld id="{F54C3776-947E-4484-AAB5-B01793E07358}" type="datetimeFigureOut">
               <a:rPr lang="en-US" smtClean="0"/>
-              <a:t>4/25/2025</a:t>
+              <a:t>5/12/2025</a:t>
             </a:fld>
             <a:endParaRPr lang="en-US"/>
           </a:p>
@@ -1149,7 +1149,7 @@
           <a:p>
             <a:fld id="{F54C3776-947E-4484-AAB5-B01793E07358}" type="datetimeFigureOut">
               <a:rPr lang="en-US" smtClean="0"/>
-              <a:t>4/25/2025</a:t>
+              <a:t>5/12/2025</a:t>
             </a:fld>
             <a:endParaRPr lang="en-US"/>
           </a:p>
@@ -1414,7 +1414,7 @@
           <a:p>
             <a:fld id="{F54C3776-947E-4484-AAB5-B01793E07358}" type="datetimeFigureOut">
               <a:rPr lang="en-US" smtClean="0"/>
-              <a:t>4/25/2025</a:t>
+              <a:t>5/12/2025</a:t>
             </a:fld>
             <a:endParaRPr lang="en-US"/>
           </a:p>
@@ -1826,7 +1826,7 @@
           <a:p>
             <a:fld id="{F54C3776-947E-4484-AAB5-B01793E07358}" type="datetimeFigureOut">
               <a:rPr lang="en-US" smtClean="0"/>
-              <a:t>4/25/2025</a:t>
+              <a:t>5/12/2025</a:t>
             </a:fld>
             <a:endParaRPr lang="en-US"/>
           </a:p>
@@ -1967,7 +1967,7 @@
           <a:p>
             <a:fld id="{F54C3776-947E-4484-AAB5-B01793E07358}" type="datetimeFigureOut">
               <a:rPr lang="en-US" smtClean="0"/>
-              <a:t>4/25/2025</a:t>
+              <a:t>5/12/2025</a:t>
             </a:fld>
             <a:endParaRPr lang="en-US"/>
           </a:p>
@@ -2080,7 +2080,7 @@
           <a:p>
             <a:fld id="{F54C3776-947E-4484-AAB5-B01793E07358}" type="datetimeFigureOut">
               <a:rPr lang="en-US" smtClean="0"/>
-              <a:t>4/25/2025</a:t>
+              <a:t>5/12/2025</a:t>
             </a:fld>
             <a:endParaRPr lang="en-US"/>
           </a:p>
@@ -2391,7 +2391,7 @@
           <a:p>
             <a:fld id="{F54C3776-947E-4484-AAB5-B01793E07358}" type="datetimeFigureOut">
               <a:rPr lang="en-US" smtClean="0"/>
-              <a:t>4/25/2025</a:t>
+              <a:t>5/12/2025</a:t>
             </a:fld>
             <a:endParaRPr lang="en-US"/>
           </a:p>
@@ -2679,7 +2679,7 @@
           <a:p>
             <a:fld id="{F54C3776-947E-4484-AAB5-B01793E07358}" type="datetimeFigureOut">
               <a:rPr lang="en-US" smtClean="0"/>
-              <a:t>4/25/2025</a:t>
+              <a:t>5/12/2025</a:t>
             </a:fld>
             <a:endParaRPr lang="en-US"/>
           </a:p>
@@ -2920,7 +2920,7 @@
           <a:p>
             <a:fld id="{F54C3776-947E-4484-AAB5-B01793E07358}" type="datetimeFigureOut">
               <a:rPr lang="en-US" smtClean="0"/>
-              <a:t>4/25/2025</a:t>
+              <a:t>5/12/2025</a:t>
             </a:fld>
             <a:endParaRPr lang="en-US"/>
           </a:p>
@@ -18477,6 +18477,25 @@
 </file>
 
 <file path=customXml/item1.xml><?xml version="1.0" encoding="utf-8"?>
+<?mso-contentType ?>
+<FormTemplates xmlns="http://schemas.microsoft.com/sharepoint/v3/contenttype/forms">
+  <Display>DocumentLibraryForm</Display>
+  <Edit>DocumentLibraryForm</Edit>
+  <New>DocumentLibraryForm</New>
+</FormTemplates>
+</file>
+
+<file path=customXml/item2.xml><?xml version="1.0" encoding="utf-8"?>
+<p:properties xmlns:p="http://schemas.microsoft.com/office/2006/metadata/properties" xmlns:xsi="http://www.w3.org/2001/XMLSchema-instance" xmlns:pc="http://schemas.microsoft.com/office/infopath/2007/PartnerControls">
+  <documentManagement>
+    <lcf76f155ced4ddcb4097134ff3c332f xmlns="5b41d8a4-d94b-4d83-b858-68ee90b5d77c">
+      <Terms xmlns="http://schemas.microsoft.com/office/infopath/2007/PartnerControls"/>
+    </lcf76f155ced4ddcb4097134ff3c332f>
+  </documentManagement>
+</p:properties>
+</file>
+
+<file path=customXml/item3.xml><?xml version="1.0" encoding="utf-8"?>
 <ct:contentTypeSchema xmlns:ct="http://schemas.microsoft.com/office/2006/metadata/contentType" xmlns:ma="http://schemas.microsoft.com/office/2006/metadata/properties/metaAttributes" ct:_="" ma:_="" ma:contentTypeName="Tài liệu" ma:contentTypeID="0x01010018F83BD7FFADD040B5AE7C0D020C45EE" ma:contentTypeVersion="15" ma:contentTypeDescription="Tạo tài liệu mới." ma:contentTypeScope="" ma:versionID="a0bb2c267ce05a01034fb4564c8966ae">
   <xsd:schema xmlns:xsd="http://www.w3.org/2001/XMLSchema" xmlns:xs="http://www.w3.org/2001/XMLSchema" xmlns:p="http://schemas.microsoft.com/office/2006/metadata/properties" xmlns:ns2="5b41d8a4-d94b-4d83-b858-68ee90b5d77c" xmlns:ns3="90e0781a-bd45-4907-b7fc-b044f10b9289" targetNamespace="http://schemas.microsoft.com/office/2006/metadata/properties" ma:root="true" ma:fieldsID="edeee281b5fc8ad99959b5a62b62c2f7" ns2:_="" ns3:_="">
     <xsd:import namespace="5b41d8a4-d94b-4d83-b858-68ee90b5d77c"/>
@@ -18705,40 +18724,10 @@
 </ct:contentTypeSchema>
 </file>
 
-<file path=customXml/item2.xml><?xml version="1.0" encoding="utf-8"?>
-<p:properties xmlns:p="http://schemas.microsoft.com/office/2006/metadata/properties" xmlns:xsi="http://www.w3.org/2001/XMLSchema-instance" xmlns:pc="http://schemas.microsoft.com/office/infopath/2007/PartnerControls">
-  <documentManagement>
-    <lcf76f155ced4ddcb4097134ff3c332f xmlns="5b41d8a4-d94b-4d83-b858-68ee90b5d77c">
-      <Terms xmlns="http://schemas.microsoft.com/office/infopath/2007/PartnerControls"/>
-    </lcf76f155ced4ddcb4097134ff3c332f>
-  </documentManagement>
-</p:properties>
-</file>
-
-<file path=customXml/item3.xml><?xml version="1.0" encoding="utf-8"?>
-<?mso-contentType ?>
-<FormTemplates xmlns="http://schemas.microsoft.com/sharepoint/v3/contenttype/forms">
-  <Display>DocumentLibraryForm</Display>
-  <Edit>DocumentLibraryForm</Edit>
-  <New>DocumentLibraryForm</New>
-</FormTemplates>
-</file>
-
 <file path=customXml/itemProps1.xml><?xml version="1.0" encoding="utf-8"?>
-<ds:datastoreItem xmlns:ds="http://schemas.openxmlformats.org/officeDocument/2006/customXml" ds:itemID="{0541C401-4577-4121-8CF9-321683A90614}">
+<ds:datastoreItem xmlns:ds="http://schemas.openxmlformats.org/officeDocument/2006/customXml" ds:itemID="{7147D112-D5D3-4F19-96AF-91101AE02472}">
   <ds:schemaRefs>
-    <ds:schemaRef ds:uri="http://schemas.microsoft.com/office/2006/metadata/contentType"/>
-    <ds:schemaRef ds:uri="http://schemas.microsoft.com/office/2006/metadata/properties/metaAttributes"/>
-    <ds:schemaRef ds:uri="http://www.w3.org/2001/XMLSchema"/>
-    <ds:schemaRef ds:uri="http://schemas.microsoft.com/office/2006/metadata/properties"/>
-    <ds:schemaRef ds:uri="5b41d8a4-d94b-4d83-b858-68ee90b5d77c"/>
-    <ds:schemaRef ds:uri="90e0781a-bd45-4907-b7fc-b044f10b9289"/>
-    <ds:schemaRef ds:uri="http://schemas.microsoft.com/office/2006/documentManagement/types"/>
-    <ds:schemaRef ds:uri="http://schemas.microsoft.com/office/infopath/2007/PartnerControls"/>
-    <ds:schemaRef ds:uri="http://schemas.openxmlformats.org/package/2006/metadata/core-properties"/>
-    <ds:schemaRef ds:uri="http://purl.org/dc/elements/1.1/"/>
-    <ds:schemaRef ds:uri="http://purl.org/dc/terms/"/>
-    <ds:schemaRef ds:uri="http://schemas.microsoft.com/internal/obd"/>
+    <ds:schemaRef ds:uri="http://schemas.microsoft.com/sharepoint/v3/contenttype/forms"/>
   </ds:schemaRefs>
 </ds:datastoreItem>
 </file>
@@ -18761,9 +18750,20 @@
 </file>
 
 <file path=customXml/itemProps3.xml><?xml version="1.0" encoding="utf-8"?>
-<ds:datastoreItem xmlns:ds="http://schemas.openxmlformats.org/officeDocument/2006/customXml" ds:itemID="{7147D112-D5D3-4F19-96AF-91101AE02472}">
+<ds:datastoreItem xmlns:ds="http://schemas.openxmlformats.org/officeDocument/2006/customXml" ds:itemID="{0541C401-4577-4121-8CF9-321683A90614}">
   <ds:schemaRefs>
-    <ds:schemaRef ds:uri="http://schemas.microsoft.com/sharepoint/v3/contenttype/forms"/>
+    <ds:schemaRef ds:uri="http://schemas.microsoft.com/office/2006/metadata/contentType"/>
+    <ds:schemaRef ds:uri="http://schemas.microsoft.com/office/2006/metadata/properties/metaAttributes"/>
+    <ds:schemaRef ds:uri="http://www.w3.org/2001/XMLSchema"/>
+    <ds:schemaRef ds:uri="http://schemas.microsoft.com/office/2006/metadata/properties"/>
+    <ds:schemaRef ds:uri="5b41d8a4-d94b-4d83-b858-68ee90b5d77c"/>
+    <ds:schemaRef ds:uri="90e0781a-bd45-4907-b7fc-b044f10b9289"/>
+    <ds:schemaRef ds:uri="http://schemas.microsoft.com/office/2006/documentManagement/types"/>
+    <ds:schemaRef ds:uri="http://schemas.microsoft.com/office/infopath/2007/PartnerControls"/>
+    <ds:schemaRef ds:uri="http://schemas.openxmlformats.org/package/2006/metadata/core-properties"/>
+    <ds:schemaRef ds:uri="http://purl.org/dc/elements/1.1/"/>
+    <ds:schemaRef ds:uri="http://purl.org/dc/terms/"/>
+    <ds:schemaRef ds:uri="http://schemas.microsoft.com/internal/obd"/>
   </ds:schemaRefs>
 </ds:datastoreItem>
 </file>